--- a/PSB.pptx
+++ b/PSB.pptx
@@ -20095,6 +20095,226 @@
           </a:blipFill>
         </p:spPr>
       </p:sp>
+      <p:sp>
+        <p:nvSpPr>
+          <p:cNvPr id="3" name="TextBox 2"/>
+          <p:cNvSpPr txBox="1"/>
+          <p:nvPr/>
+        </p:nvSpPr>
+        <p:spPr>
+          <a:xfrm>
+            <a:off x="1000000" y="3500000"/>
+            <a:ext cx="7500000" cy="2400000"/>
+          </a:xfrm>
+          <a:prstGeom prst="rect">
+            <a:avLst/>
+          </a:prstGeom>
+          <a:noFill/>
+        </p:spPr>
+        <p:txBody>
+          <a:bodyPr wrap="square">
+            <a:spAutoFit/>
+          </a:bodyPr>
+          <a:lstStyle/>
+          <a:p>
+            <a:pPr>
+              <a:spcAft>
+                <a:spcPts val="1000"/>
+              </a:spcAft>
+              <a:defRPr sz="2400">
+                <a:solidFill>
+                  <a:srgbClr val="215061"/>
+                </a:solidFill>
+                <a:latin typeface="Agrandir Narrow Bold"/>
+              </a:defRPr>
+            </a:pPr>
+            <a:r>
+              <a:t>Account Aggregator Gateway</a:t>
+            </a:r>
+          </a:p>
+          <a:p>
+            <a:pPr>
+              <a:lnSpc>
+                <a:spcPct val="120000"/>
+              </a:lnSpc>
+              <a:defRPr sz="1600">
+                <a:solidFill>
+                  <a:srgbClr val="035C7C"/>
+                </a:solidFill>
+                <a:latin typeface="Agrandir Narrow"/>
+              </a:defRPr>
+            </a:pPr>
+            <a:r>
+              <a:t>Finvu AA framework integration pulls real-time, end-to-end encrypted bank transaction data. Eliminates manual PDF uploads and parsing errors using standard consent artefacts.</a:t>
+            </a:r>
+          </a:p>
+        </p:txBody>
+      </p:sp>
+      <p:sp>
+        <p:nvSpPr>
+          <p:cNvPr id="4" name="TextBox 3"/>
+          <p:cNvSpPr txBox="1"/>
+          <p:nvPr/>
+        </p:nvSpPr>
+        <p:spPr>
+          <a:xfrm>
+            <a:off x="9788000" y="3500000"/>
+            <a:ext cx="7500000" cy="2400000"/>
+          </a:xfrm>
+          <a:prstGeom prst="rect">
+            <a:avLst/>
+          </a:prstGeom>
+          <a:noFill/>
+        </p:spPr>
+        <p:txBody>
+          <a:bodyPr wrap="square">
+            <a:spAutoFit/>
+          </a:bodyPr>
+          <a:lstStyle/>
+          <a:p>
+            <a:pPr>
+              <a:spcAft>
+                <a:spcPts val="1000"/>
+              </a:spcAft>
+              <a:defRPr sz="2400">
+                <a:solidFill>
+                  <a:srgbClr val="215061"/>
+                </a:solidFill>
+                <a:latin typeface="Agrandir Narrow Bold"/>
+              </a:defRPr>
+            </a:pPr>
+            <a:r>
+              <a:t>Identity API (sandbox.co.in)</a:t>
+            </a:r>
+          </a:p>
+          <a:p>
+            <a:pPr>
+              <a:lnSpc>
+                <a:spcPct val="120000"/>
+              </a:lnSpc>
+              <a:defRPr sz="1600">
+                <a:solidFill>
+                  <a:srgbClr val="035C7C"/>
+                </a:solidFill>
+                <a:latin typeface="Agrandir Narrow"/>
+              </a:defRPr>
+            </a:pPr>
+            <a:r>
+              <a:t>Automated 3-step KYC pipeline verifies PAN cards against Income Tax databases and executes Aadhaar OTP verification. Integrates OpenCV face liveness detection to catch spoofs.</a:t>
+            </a:r>
+          </a:p>
+        </p:txBody>
+      </p:sp>
+      <p:sp>
+        <p:nvSpPr>
+          <p:cNvPr id="5" name="TextBox 4"/>
+          <p:cNvSpPr txBox="1"/>
+          <p:nvPr/>
+        </p:nvSpPr>
+        <p:spPr>
+          <a:xfrm>
+            <a:off x="1000000" y="6500000"/>
+            <a:ext cx="7500000" cy="2400000"/>
+          </a:xfrm>
+          <a:prstGeom prst="rect">
+            <a:avLst/>
+          </a:prstGeom>
+          <a:noFill/>
+        </p:spPr>
+        <p:txBody>
+          <a:bodyPr wrap="square">
+            <a:spAutoFit/>
+          </a:bodyPr>
+          <a:lstStyle/>
+          <a:p>
+            <a:pPr>
+              <a:spcAft>
+                <a:spcPts val="1000"/>
+              </a:spcAft>
+              <a:defRPr sz="2400">
+                <a:solidFill>
+                  <a:srgbClr val="215061"/>
+                </a:solidFill>
+                <a:latin typeface="Agrandir Narrow Bold"/>
+              </a:defRPr>
+            </a:pPr>
+            <a:r>
+              <a:t>Gmail API Integration</a:t>
+            </a:r>
+          </a:p>
+          <a:p>
+            <a:pPr>
+              <a:lnSpc>
+                <a:spcPct val="120000"/>
+              </a:lnSpc>
+              <a:defRPr sz="1600">
+                <a:solidFill>
+                  <a:srgbClr val="035C7C"/>
+                </a:solidFill>
+                <a:latin typeface="Agrandir Narrow"/>
+              </a:defRPr>
+            </a:pPr>
+            <a:r>
+              <a:t>OAuth2-based reading of digital financial transactions serves as a secondary fallback. Scopes are restricted to gmail.readonly for transaction confirmation alerts.</a:t>
+            </a:r>
+          </a:p>
+        </p:txBody>
+      </p:sp>
+      <p:sp>
+        <p:nvSpPr>
+          <p:cNvPr id="6" name="TextBox 5"/>
+          <p:cNvSpPr txBox="1"/>
+          <p:nvPr/>
+        </p:nvSpPr>
+        <p:spPr>
+          <a:xfrm>
+            <a:off x="9788000" y="6500000"/>
+            <a:ext cx="7500000" cy="2400000"/>
+          </a:xfrm>
+          <a:prstGeom prst="rect">
+            <a:avLst/>
+          </a:prstGeom>
+          <a:noFill/>
+        </p:spPr>
+        <p:txBody>
+          <a:bodyPr wrap="square">
+            <a:spAutoFit/>
+          </a:bodyPr>
+          <a:lstStyle/>
+          <a:p>
+            <a:pPr>
+              <a:spcAft>
+                <a:spcPts val="1000"/>
+              </a:spcAft>
+              <a:defRPr sz="2400">
+                <a:solidFill>
+                  <a:srgbClr val="215061"/>
+                </a:solidFill>
+                <a:latin typeface="Agrandir Narrow Bold"/>
+              </a:defRPr>
+            </a:pPr>
+            <a:r>
+              <a:t>Core Banking System (CBS) API</a:t>
+            </a:r>
+          </a:p>
+          <a:p>
+            <a:pPr>
+              <a:lnSpc>
+                <a:spcPct val="120000"/>
+              </a:lnSpc>
+              <a:defRPr sz="1600">
+                <a:solidFill>
+                  <a:srgbClr val="035C7C"/>
+                </a:solidFill>
+                <a:latin typeface="Agrandir Narrow"/>
+              </a:defRPr>
+            </a:pPr>
+            <a:r>
+              <a:t>API-first microservice architecture exposes async REST endpoints for simple LOS integration. Type-safe request/response contracts are validated via Pydantic v2 schemas.</a:t>
+            </a:r>
+          </a:p>
+        </p:txBody>
+      </p:sp>
     </p:spTree>
   </p:cSld>
   <p:clrMapOvr>
